--- a/temas/intro2026.pptx
+++ b/temas/intro2026.pptx
@@ -40,7 +40,7 @@
     <p:sldId id="286" r:id="rId31"/>
   </p:sldIdLst>
   <p:sldSz cx="9144000" cy="6858000" type="screen4x3"/>
-  <p:notesSz cx="6797675" cy="9926638"/>
+  <p:notesSz cx="7104063" cy="10234613"/>
   <p:defaultTextStyle>
     <a:defPPr>
       <a:defRPr lang="en-US"/>
@@ -220,14 +220,14 @@
         <p:spPr>
           <a:xfrm>
             <a:off x="0" y="0"/>
-            <a:ext cx="2946400" cy="496333"/>
+            <a:ext cx="3079202" cy="511732"/>
           </a:xfrm>
           <a:prstGeom prst="rect">
             <a:avLst/>
           </a:prstGeom>
         </p:spPr>
         <p:txBody>
-          <a:bodyPr vert="horz" lIns="91440" tIns="45720" rIns="91440" bIns="45720" rtlCol="0"/>
+          <a:bodyPr vert="horz" lIns="94796" tIns="47398" rIns="94796" bIns="47398" rtlCol="0"/>
           <a:lstStyle>
             <a:lvl1pPr algn="l">
               <a:defRPr sz="1200"/>
@@ -250,15 +250,15 @@
         </p:nvSpPr>
         <p:spPr>
           <a:xfrm>
-            <a:off x="3849688" y="0"/>
-            <a:ext cx="2946400" cy="496333"/>
+            <a:off x="4023203" y="0"/>
+            <a:ext cx="3079202" cy="511732"/>
           </a:xfrm>
           <a:prstGeom prst="rect">
             <a:avLst/>
           </a:prstGeom>
         </p:spPr>
         <p:txBody>
-          <a:bodyPr vert="horz" lIns="91440" tIns="45720" rIns="91440" bIns="45720" rtlCol="0"/>
+          <a:bodyPr vert="horz" lIns="94796" tIns="47398" rIns="94796" bIns="47398" rtlCol="0"/>
           <a:lstStyle>
             <a:lvl1pPr algn="r">
               <a:defRPr sz="1200"/>
@@ -267,7 +267,7 @@
           <a:p>
             <a:fld id="{2245A84E-8D53-4A8D-A36D-9144D4C546B9}" type="datetimeFigureOut">
               <a:rPr lang="en-US" smtClean="0"/>
-              <a:t>2/23/2026</a:t>
+              <a:t>3/5/2026</a:t>
             </a:fld>
             <a:endParaRPr lang="en-US"/>
           </a:p>
@@ -285,15 +285,15 @@
         </p:nvSpPr>
         <p:spPr>
           <a:xfrm>
-            <a:off x="0" y="9428710"/>
-            <a:ext cx="2946400" cy="496333"/>
+            <a:off x="0" y="9721237"/>
+            <a:ext cx="3079202" cy="511732"/>
           </a:xfrm>
           <a:prstGeom prst="rect">
             <a:avLst/>
           </a:prstGeom>
         </p:spPr>
         <p:txBody>
-          <a:bodyPr vert="horz" lIns="91440" tIns="45720" rIns="91440" bIns="45720" rtlCol="0" anchor="b"/>
+          <a:bodyPr vert="horz" lIns="94796" tIns="47398" rIns="94796" bIns="47398" rtlCol="0" anchor="b"/>
           <a:lstStyle>
             <a:lvl1pPr algn="l">
               <a:defRPr sz="1200"/>
@@ -316,15 +316,15 @@
         </p:nvSpPr>
         <p:spPr>
           <a:xfrm>
-            <a:off x="3849688" y="9428710"/>
-            <a:ext cx="2946400" cy="496333"/>
+            <a:off x="4023203" y="9721237"/>
+            <a:ext cx="3079202" cy="511732"/>
           </a:xfrm>
           <a:prstGeom prst="rect">
             <a:avLst/>
           </a:prstGeom>
         </p:spPr>
         <p:txBody>
-          <a:bodyPr vert="horz" lIns="91440" tIns="45720" rIns="91440" bIns="45720" rtlCol="0" anchor="b"/>
+          <a:bodyPr vert="horz" lIns="94796" tIns="47398" rIns="94796" bIns="47398" rtlCol="0" anchor="b"/>
           <a:lstStyle>
             <a:lvl1pPr algn="r">
               <a:defRPr sz="1200"/>
@@ -347,6 +347,7 @@
     </p:extLst>
   </p:cSld>
   <p:clrMap bg1="lt1" tx1="dk1" bg2="lt2" tx2="dk2" accent1="accent1" accent2="accent2" accent3="accent3" accent4="accent4" accent5="accent5" accent6="accent6" hlink="hlink" folHlink="folHlink"/>
+  <p:hf sldNum="0" hdr="0" ftr="0" dt="0"/>
 </p:handoutMaster>
 </file>
 
@@ -384,15 +385,15 @@
         </p:nvSpPr>
         <p:spPr>
           <a:xfrm>
-            <a:off x="2" y="0"/>
-            <a:ext cx="2945659" cy="496333"/>
+            <a:off x="3" y="0"/>
+            <a:ext cx="3078427" cy="511732"/>
           </a:xfrm>
           <a:prstGeom prst="rect">
             <a:avLst/>
           </a:prstGeom>
         </p:spPr>
         <p:txBody>
-          <a:bodyPr vert="horz" lIns="91440" tIns="45720" rIns="91440" bIns="45720" rtlCol="0"/>
+          <a:bodyPr vert="horz" lIns="94796" tIns="47398" rIns="94796" bIns="47398" rtlCol="0"/>
           <a:lstStyle>
             <a:lvl1pPr algn="l" fontAlgn="auto">
               <a:spcBef>
@@ -427,15 +428,15 @@
         </p:nvSpPr>
         <p:spPr>
           <a:xfrm>
-            <a:off x="3850445" y="0"/>
-            <a:ext cx="2945659" cy="496333"/>
+            <a:off x="4023995" y="0"/>
+            <a:ext cx="3078427" cy="511732"/>
           </a:xfrm>
           <a:prstGeom prst="rect">
             <a:avLst/>
           </a:prstGeom>
         </p:spPr>
         <p:txBody>
-          <a:bodyPr vert="horz" lIns="91440" tIns="45720" rIns="91440" bIns="45720" rtlCol="0"/>
+          <a:bodyPr vert="horz" lIns="94796" tIns="47398" rIns="94796" bIns="47398" rtlCol="0"/>
           <a:lstStyle>
             <a:lvl1pPr algn="r" fontAlgn="auto">
               <a:spcBef>
@@ -459,7 +460,7 @@
               <a:pPr>
                 <a:defRPr/>
               </a:pPr>
-              <a:t>2/23/2026</a:t>
+              <a:t>3/5/2026</a:t>
             </a:fld>
             <a:endParaRPr lang="en-US"/>
           </a:p>
@@ -477,8 +478,8 @@
         </p:nvSpPr>
         <p:spPr>
           <a:xfrm>
-            <a:off x="919163" y="746125"/>
-            <a:ext cx="4959350" cy="3721100"/>
+            <a:off x="995363" y="769938"/>
+            <a:ext cx="5113337" cy="3835400"/>
           </a:xfrm>
           <a:prstGeom prst="rect">
             <a:avLst/>
@@ -491,7 +492,7 @@
           </a:ln>
         </p:spPr>
         <p:txBody>
-          <a:bodyPr vert="horz" lIns="91440" tIns="45720" rIns="91440" bIns="45720" rtlCol="0" anchor="ctr"/>
+          <a:bodyPr vert="horz" lIns="94796" tIns="47398" rIns="94796" bIns="47398" rtlCol="0" anchor="ctr"/>
           <a:lstStyle/>
           <a:p>
             <a:pPr lvl="0"/>
@@ -511,15 +512,15 @@
         </p:nvSpPr>
         <p:spPr>
           <a:xfrm>
-            <a:off x="679768" y="4715154"/>
-            <a:ext cx="5438140" cy="4466988"/>
+            <a:off x="710407" y="4861442"/>
+            <a:ext cx="5683250" cy="4605577"/>
           </a:xfrm>
           <a:prstGeom prst="rect">
             <a:avLst/>
           </a:prstGeom>
         </p:spPr>
         <p:txBody>
-          <a:bodyPr vert="horz" lIns="91440" tIns="45720" rIns="91440" bIns="45720" rtlCol="0">
+          <a:bodyPr vert="horz" lIns="94796" tIns="47398" rIns="94796" bIns="47398" rtlCol="0">
             <a:normAutofit/>
           </a:bodyPr>
           <a:lstStyle/>
@@ -572,15 +573,15 @@
         </p:nvSpPr>
         <p:spPr>
           <a:xfrm>
-            <a:off x="2" y="9428583"/>
-            <a:ext cx="2945659" cy="496333"/>
+            <a:off x="3" y="9721106"/>
+            <a:ext cx="3078427" cy="511732"/>
           </a:xfrm>
           <a:prstGeom prst="rect">
             <a:avLst/>
           </a:prstGeom>
         </p:spPr>
         <p:txBody>
-          <a:bodyPr vert="horz" lIns="91440" tIns="45720" rIns="91440" bIns="45720" rtlCol="0" anchor="b"/>
+          <a:bodyPr vert="horz" lIns="94796" tIns="47398" rIns="94796" bIns="47398" rtlCol="0" anchor="b"/>
           <a:lstStyle>
             <a:lvl1pPr algn="l" fontAlgn="auto">
               <a:spcBef>
@@ -615,15 +616,15 @@
         </p:nvSpPr>
         <p:spPr>
           <a:xfrm>
-            <a:off x="3850445" y="9428583"/>
-            <a:ext cx="2945659" cy="496333"/>
+            <a:off x="4023995" y="9721106"/>
+            <a:ext cx="3078427" cy="511732"/>
           </a:xfrm>
           <a:prstGeom prst="rect">
             <a:avLst/>
           </a:prstGeom>
         </p:spPr>
         <p:txBody>
-          <a:bodyPr vert="horz" lIns="91440" tIns="45720" rIns="91440" bIns="45720" rtlCol="0" anchor="b"/>
+          <a:bodyPr vert="horz" lIns="94796" tIns="47398" rIns="94796" bIns="47398" rtlCol="0" anchor="b"/>
           <a:lstStyle>
             <a:lvl1pPr algn="r" fontAlgn="auto">
               <a:spcBef>
@@ -661,6 +662,7 @@
     </p:extLst>
   </p:cSld>
   <p:clrMap bg1="lt1" tx1="dk1" bg2="lt2" tx2="dk2" accent1="accent1" accent2="accent2" accent3="accent3" accent4="accent4" accent5="accent5" accent6="accent6" hlink="hlink" folHlink="folHlink"/>
+  <p:hf sldNum="0" hdr="0" ftr="0" dt="0"/>
   <p:notesStyle>
     <a:lvl1pPr algn="l" rtl="0" eaLnBrk="0" fontAlgn="base" hangingPunct="0">
       <a:spcBef>
@@ -805,32 +807,6 @@
       </p:grpSpPr>
       <p:sp>
         <p:nvSpPr>
-          <p:cNvPr id="7" name="Rectangle 7"/>
-          <p:cNvSpPr>
-            <a:spLocks noGrp="1" noChangeArrowheads="1"/>
-          </p:cNvSpPr>
-          <p:nvPr>
-            <p:ph type="sldNum" sz="quarter" idx="5"/>
-          </p:nvPr>
-        </p:nvSpPr>
-        <p:spPr>
-          <a:ln/>
-        </p:spPr>
-        <p:txBody>
-          <a:bodyPr/>
-          <a:lstStyle/>
-          <a:p>
-            <a:fld id="{4BBFE55E-BBDB-4870-A0FE-38D8D37AC5F7}" type="slidenum">
-              <a:rPr lang="es-ES"/>
-              <a:pPr/>
-              <a:t>9</a:t>
-            </a:fld>
-            <a:endParaRPr lang="es-ES"/>
-          </a:p>
-        </p:txBody>
-      </p:sp>
-      <p:sp>
-        <p:nvSpPr>
           <p:cNvPr id="21506" name="Rectangle 2"/>
           <p:cNvSpPr>
             <a:spLocks noGrp="1" noRot="1" noChangeAspect="1" noChangeArrowheads="1" noTextEdit="1"/>
@@ -841,8 +817,8 @@
         </p:nvSpPr>
         <p:spPr bwMode="auto">
           <a:xfrm>
-            <a:off x="919163" y="746125"/>
-            <a:ext cx="4959350" cy="3721100"/>
+            <a:off x="995363" y="769938"/>
+            <a:ext cx="5113337" cy="3835400"/>
           </a:xfrm>
           <a:prstGeom prst="rect">
             <a:avLst/>
@@ -872,8 +848,8 @@
         </p:nvSpPr>
         <p:spPr bwMode="auto">
           <a:xfrm>
-            <a:off x="906357" y="4715154"/>
-            <a:ext cx="4984962" cy="4466988"/>
+            <a:off x="947209" y="4861442"/>
+            <a:ext cx="5209647" cy="4605577"/>
           </a:xfrm>
           <a:prstGeom prst="rect">
             <a:avLst/>
@@ -925,32 +901,6 @@
       </p:grpSpPr>
       <p:sp>
         <p:nvSpPr>
-          <p:cNvPr id="7" name="Rectangle 7"/>
-          <p:cNvSpPr>
-            <a:spLocks noGrp="1" noChangeArrowheads="1"/>
-          </p:cNvSpPr>
-          <p:nvPr>
-            <p:ph type="sldNum" sz="quarter" idx="5"/>
-          </p:nvPr>
-        </p:nvSpPr>
-        <p:spPr>
-          <a:ln/>
-        </p:spPr>
-        <p:txBody>
-          <a:bodyPr/>
-          <a:lstStyle/>
-          <a:p>
-            <a:fld id="{4BBFE55E-BBDB-4870-A0FE-38D8D37AC5F7}" type="slidenum">
-              <a:rPr lang="es-ES"/>
-              <a:pPr/>
-              <a:t>10</a:t>
-            </a:fld>
-            <a:endParaRPr lang="es-ES"/>
-          </a:p>
-        </p:txBody>
-      </p:sp>
-      <p:sp>
-        <p:nvSpPr>
           <p:cNvPr id="21506" name="Rectangle 2"/>
           <p:cNvSpPr>
             <a:spLocks noGrp="1" noRot="1" noChangeAspect="1" noChangeArrowheads="1" noTextEdit="1"/>
@@ -961,8 +911,8 @@
         </p:nvSpPr>
         <p:spPr bwMode="auto">
           <a:xfrm>
-            <a:off x="919163" y="746125"/>
-            <a:ext cx="4959350" cy="3721100"/>
+            <a:off x="995363" y="769938"/>
+            <a:ext cx="5113337" cy="3835400"/>
           </a:xfrm>
           <a:prstGeom prst="rect">
             <a:avLst/>
@@ -992,8 +942,8 @@
         </p:nvSpPr>
         <p:spPr bwMode="auto">
           <a:xfrm>
-            <a:off x="906357" y="4715154"/>
-            <a:ext cx="4984962" cy="4466988"/>
+            <a:off x="947209" y="4861442"/>
+            <a:ext cx="5209647" cy="4605577"/>
           </a:xfrm>
           <a:prstGeom prst="rect">
             <a:avLst/>
@@ -1170,12 +1120,9 @@
             <a:pPr>
               <a:defRPr/>
             </a:pPr>
-            <a:fld id="{4535C112-1C1E-4E7D-971C-EC57DA7606C6}" type="datetimeFigureOut">
+            <a:fld id="{8FFE1FA6-8FF0-4234-89B7-9E37A5FD4028}" type="datetime1">
               <a:rPr lang="en-US" smtClean="0"/>
-              <a:pPr>
-                <a:defRPr/>
-              </a:pPr>
-              <a:t>2/23/2026</a:t>
+              <a:t>3/5/2026</a:t>
             </a:fld>
             <a:endParaRPr lang="en-US"/>
           </a:p>
@@ -1544,12 +1491,9 @@
             <a:pPr>
               <a:defRPr/>
             </a:pPr>
-            <a:fld id="{3F90A5B3-6E71-4C6A-A179-D5EFD850DAC2}" type="datetimeFigureOut">
+            <a:fld id="{617FF2B5-861C-4A5E-B7ED-A0A72400D853}" type="datetime1">
               <a:rPr lang="en-US" smtClean="0"/>
-              <a:pPr>
-                <a:defRPr/>
-              </a:pPr>
-              <a:t>2/23/2026</a:t>
+              <a:t>3/5/2026</a:t>
             </a:fld>
             <a:endParaRPr lang="en-US"/>
           </a:p>
@@ -1734,12 +1678,9 @@
             <a:pPr>
               <a:defRPr/>
             </a:pPr>
-            <a:fld id="{2D5028C4-BDA6-425A-8CD0-CC11084024A7}" type="datetimeFigureOut">
+            <a:fld id="{A4BD13A0-685C-4F5B-AD5C-414C4D3B4936}" type="datetime1">
               <a:rPr lang="en-US" smtClean="0"/>
-              <a:pPr>
-                <a:defRPr/>
-              </a:pPr>
-              <a:t>2/23/2026</a:t>
+              <a:t>3/5/2026</a:t>
             </a:fld>
             <a:endParaRPr lang="en-US"/>
           </a:p>
@@ -1984,12 +1925,9 @@
             <a:pPr>
               <a:defRPr/>
             </a:pPr>
-            <a:fld id="{A100AABD-07F0-4E6D-949D-EFFB33B6C197}" type="datetimeFigureOut">
+            <a:fld id="{69A06B08-0CDE-493E-BE90-357F71366035}" type="datetime1">
               <a:rPr lang="en-US" smtClean="0"/>
-              <a:pPr>
-                <a:defRPr/>
-              </a:pPr>
-              <a:t>2/23/2026</a:t>
+              <a:t>3/5/2026</a:t>
             </a:fld>
             <a:endParaRPr lang="en-US"/>
           </a:p>
@@ -2268,12 +2206,9 @@
             <a:pPr>
               <a:defRPr/>
             </a:pPr>
-            <a:fld id="{5322F3FC-6D4F-4961-B133-AF7DCC495CAA}" type="datetimeFigureOut">
+            <a:fld id="{DF0A91B6-8EBF-4B4C-A528-BD40E6D49742}" type="datetime1">
               <a:rPr lang="en-US" smtClean="0"/>
-              <a:pPr>
-                <a:defRPr/>
-              </a:pPr>
-              <a:t>2/23/2026</a:t>
+              <a:t>3/5/2026</a:t>
             </a:fld>
             <a:endParaRPr lang="en-US"/>
           </a:p>
@@ -2503,12 +2438,9 @@
             <a:pPr>
               <a:defRPr/>
             </a:pPr>
-            <a:fld id="{BC13170A-2925-4D47-BB94-21440FE29158}" type="datetimeFigureOut">
+            <a:fld id="{EED64FD9-11DC-4CDF-9874-770E7AB72984}" type="datetime1">
               <a:rPr lang="en-US" smtClean="0"/>
-              <a:pPr>
-                <a:defRPr/>
-              </a:pPr>
-              <a:t>2/23/2026</a:t>
+              <a:t>3/5/2026</a:t>
             </a:fld>
             <a:endParaRPr lang="en-US"/>
           </a:p>
@@ -2870,12 +2802,9 @@
             <a:pPr>
               <a:defRPr/>
             </a:pPr>
-            <a:fld id="{372C5228-A50E-49B7-ACD0-27FB0497B88F}" type="datetimeFigureOut">
+            <a:fld id="{93B0C871-F939-489B-A079-111A1502F9E4}" type="datetime1">
               <a:rPr lang="en-US" smtClean="0"/>
-              <a:pPr>
-                <a:defRPr/>
-              </a:pPr>
-              <a:t>2/23/2026</a:t>
+              <a:t>3/5/2026</a:t>
             </a:fld>
             <a:endParaRPr lang="en-US"/>
           </a:p>
@@ -3117,12 +3046,9 @@
             <a:pPr>
               <a:defRPr/>
             </a:pPr>
-            <a:fld id="{FD9962D0-FFA1-4976-904D-980D8BA902B4}" type="datetimeFigureOut">
+            <a:fld id="{711233EA-2FA5-486C-BAEE-B88DAC4E0FBB}" type="datetime1">
               <a:rPr lang="en-US" smtClean="0"/>
-              <a:pPr>
-                <a:defRPr/>
-              </a:pPr>
-              <a:t>2/23/2026</a:t>
+              <a:t>3/5/2026</a:t>
             </a:fld>
             <a:endParaRPr lang="en-US"/>
           </a:p>
@@ -3272,12 +3198,9 @@
             <a:pPr>
               <a:defRPr/>
             </a:pPr>
-            <a:fld id="{B2A85265-DE67-4F9F-919E-36C088682D52}" type="datetimeFigureOut">
+            <a:fld id="{B6E7A3D1-6C4A-495E-A895-806A1D53349E}" type="datetime1">
               <a:rPr lang="en-US" smtClean="0"/>
-              <a:pPr>
-                <a:defRPr/>
-              </a:pPr>
-              <a:t>2/23/2026</a:t>
+              <a:t>3/5/2026</a:t>
             </a:fld>
             <a:endParaRPr lang="en-US"/>
           </a:p>
@@ -3564,12 +3487,9 @@
             <a:pPr>
               <a:defRPr/>
             </a:pPr>
-            <a:fld id="{2B27ED6E-8465-4C4C-B72A-8F9EEA409536}" type="datetimeFigureOut">
+            <a:fld id="{86794732-34D5-4D95-B329-440325010871}" type="datetime1">
               <a:rPr lang="en-US" smtClean="0"/>
-              <a:pPr>
-                <a:defRPr/>
-              </a:pPr>
-              <a:t>2/23/2026</a:t>
+              <a:t>3/5/2026</a:t>
             </a:fld>
             <a:endParaRPr lang="en-US"/>
           </a:p>
@@ -3986,12 +3906,9 @@
             <a:pPr>
               <a:defRPr/>
             </a:pPr>
-            <a:fld id="{9F24282C-789D-4661-8BAF-2500E4AC851D}" type="datetimeFigureOut">
+            <a:fld id="{47E1163D-88D4-4307-83EF-CEC3B6F33FA7}" type="datetime1">
               <a:rPr lang="en-US" smtClean="0"/>
-              <a:pPr>
-                <a:defRPr/>
-              </a:pPr>
-              <a:t>2/23/2026</a:t>
+              <a:t>3/5/2026</a:t>
             </a:fld>
             <a:endParaRPr lang="en-US"/>
           </a:p>
@@ -4339,12 +4256,9 @@
             <a:pPr>
               <a:defRPr/>
             </a:pPr>
-            <a:fld id="{F9720487-2811-43F5-A35E-F31A9C44A79E}" type="datetimeFigureOut">
+            <a:fld id="{61741288-7D90-4A2B-9F42-C80F811510BE}" type="datetime1">
               <a:rPr lang="en-US" smtClean="0"/>
-              <a:pPr>
-                <a:defRPr/>
-              </a:pPr>
-              <a:t>2/23/2026</a:t>
+              <a:t>3/5/2026</a:t>
             </a:fld>
             <a:endParaRPr lang="en-US" dirty="0">
               <a:solidFill>
@@ -4583,6 +4497,7 @@
     <p:sldLayoutId id="2147483760" r:id="rId10"/>
     <p:sldLayoutId id="2147483761" r:id="rId11"/>
   </p:sldLayoutIdLst>
+  <p:hf sldNum="0" hdr="0" ftr="0" dt="0"/>
   <p:txStyles>
     <p:titleStyle>
       <a:lvl1pPr algn="l" rtl="0" eaLnBrk="1" latinLnBrk="0" hangingPunct="1">
@@ -6980,7 +6895,7 @@
           <p:nvPr/>
         </p:nvPicPr>
         <p:blipFill>
-          <a:blip r:embed="rId2">
+          <a:blip r:embed="rId2" cstate="print">
             <a:extLst>
               <a:ext uri="{28A0092B-C50C-407E-A947-70E740481C1C}">
                 <a14:useLocalDpi xmlns:a14="http://schemas.microsoft.com/office/drawing/2010/main" val="0"/>
@@ -7074,7 +6989,7 @@
           <p:nvPr/>
         </p:nvPicPr>
         <p:blipFill>
-          <a:blip r:embed="rId4">
+          <a:blip r:embed="rId4" cstate="print">
             <a:extLst>
               <a:ext uri="{28A0092B-C50C-407E-A947-70E740481C1C}">
                 <a14:useLocalDpi xmlns:a14="http://schemas.microsoft.com/office/drawing/2010/main" val="0"/>
@@ -7215,7 +7130,7 @@
           <p:nvPr/>
         </p:nvPicPr>
         <p:blipFill>
-          <a:blip r:embed="rId7">
+          <a:blip r:embed="rId7" cstate="print">
             <a:extLst>
               <a:ext uri="{28A0092B-C50C-407E-A947-70E740481C1C}">
                 <a14:useLocalDpi xmlns:a14="http://schemas.microsoft.com/office/drawing/2010/main" val="0"/>
@@ -7262,7 +7177,7 @@
           <p:nvPr/>
         </p:nvPicPr>
         <p:blipFill>
-          <a:blip r:embed="rId8">
+          <a:blip r:embed="rId8" cstate="print">
             <a:extLst>
               <a:ext uri="{28A0092B-C50C-407E-A947-70E740481C1C}">
                 <a14:useLocalDpi xmlns:a14="http://schemas.microsoft.com/office/drawing/2010/main" val="0"/>
@@ -12913,18 +12828,18 @@
 </file>
 
 <file path=customXml/item1.xml><?xml version="1.0" encoding="utf-8"?>
-<p:properties xmlns:p="http://schemas.microsoft.com/office/2006/metadata/properties" xmlns:xsi="http://www.w3.org/2001/XMLSchema-instance" xmlns:pc="http://schemas.microsoft.com/office/infopath/2007/PartnerControls">
-  <documentManagement/>
-</p:properties>
-</file>
-
-<file path=customXml/item2.xml><?xml version="1.0" encoding="utf-8"?>
 <?mso-contentType ?>
 <FormTemplates xmlns="http://schemas.microsoft.com/sharepoint/v3/contenttype/forms">
   <Display>DocumentLibraryForm</Display>
   <Edit>DocumentLibraryForm</Edit>
   <New>DocumentLibraryForm</New>
 </FormTemplates>
+</file>
+
+<file path=customXml/item2.xml><?xml version="1.0" encoding="utf-8"?>
+<p:properties xmlns:p="http://schemas.microsoft.com/office/2006/metadata/properties" xmlns:xsi="http://www.w3.org/2001/XMLSchema-instance" xmlns:pc="http://schemas.microsoft.com/office/infopath/2007/PartnerControls">
+  <documentManagement/>
+</p:properties>
 </file>
 
 <file path=customXml/item3.xml><?xml version="1.0" encoding="utf-8"?>
@@ -13137,26 +13052,26 @@
 </file>
 
 <file path=customXml/itemProps1.xml><?xml version="1.0" encoding="utf-8"?>
-<ds:datastoreItem xmlns:ds="http://schemas.openxmlformats.org/officeDocument/2006/customXml" ds:itemID="{C4052234-4F05-44DE-9654-247F8CD78F7B}">
+<ds:datastoreItem xmlns:ds="http://schemas.openxmlformats.org/officeDocument/2006/customXml" ds:itemID="{D7792CB8-57C7-47F1-B9EF-BB12916B3769}">
   <ds:schemaRefs>
-    <ds:schemaRef ds:uri="http://schemas.microsoft.com/office/infopath/2007/PartnerControls"/>
-    <ds:schemaRef ds:uri="http://schemas.microsoft.com/office/2006/documentManagement/types"/>
-    <ds:schemaRef ds:uri="http://purl.org/dc/terms/"/>
-    <ds:schemaRef ds:uri="http://purl.org/dc/elements/1.1/"/>
-    <ds:schemaRef ds:uri="http://purl.org/dc/dcmitype/"/>
-    <ds:schemaRef ds:uri="http://schemas.microsoft.com/office/2006/metadata/properties"/>
-    <ds:schemaRef ds:uri="b7216d0d-3061-4c5f-91f9-f9dbb705efc2"/>
-    <ds:schemaRef ds:uri="http://schemas.openxmlformats.org/package/2006/metadata/core-properties"/>
-    <ds:schemaRef ds:uri="2d68f367-3448-4584-8be4-e5200f1a88eb"/>
-    <ds:schemaRef ds:uri="http://www.w3.org/XML/1998/namespace"/>
+    <ds:schemaRef ds:uri="http://schemas.microsoft.com/sharepoint/v3/contenttype/forms"/>
   </ds:schemaRefs>
 </ds:datastoreItem>
 </file>
 
 <file path=customXml/itemProps2.xml><?xml version="1.0" encoding="utf-8"?>
-<ds:datastoreItem xmlns:ds="http://schemas.openxmlformats.org/officeDocument/2006/customXml" ds:itemID="{D7792CB8-57C7-47F1-B9EF-BB12916B3769}">
+<ds:datastoreItem xmlns:ds="http://schemas.openxmlformats.org/officeDocument/2006/customXml" ds:itemID="{C4052234-4F05-44DE-9654-247F8CD78F7B}">
   <ds:schemaRefs>
-    <ds:schemaRef ds:uri="http://schemas.microsoft.com/sharepoint/v3/contenttype/forms"/>
+    <ds:schemaRef ds:uri="http://schemas.openxmlformats.org/package/2006/metadata/core-properties"/>
+    <ds:schemaRef ds:uri="2d68f367-3448-4584-8be4-e5200f1a88eb"/>
+    <ds:schemaRef ds:uri="http://schemas.microsoft.com/office/infopath/2007/PartnerControls"/>
+    <ds:schemaRef ds:uri="http://www.w3.org/XML/1998/namespace"/>
+    <ds:schemaRef ds:uri="http://schemas.microsoft.com/office/2006/documentManagement/types"/>
+    <ds:schemaRef ds:uri="b7216d0d-3061-4c5f-91f9-f9dbb705efc2"/>
+    <ds:schemaRef ds:uri="http://purl.org/dc/dcmitype/"/>
+    <ds:schemaRef ds:uri="http://schemas.microsoft.com/office/2006/metadata/properties"/>
+    <ds:schemaRef ds:uri="http://purl.org/dc/terms/"/>
+    <ds:schemaRef ds:uri="http://purl.org/dc/elements/1.1/"/>
   </ds:schemaRefs>
 </ds:datastoreItem>
 </file>
